--- a/cursos/recursos/desequilibrios-de-material/15-sacrificios-de-pieza.pptx
+++ b/cursos/recursos/desequilibrios-de-material/15-sacrificios-de-pieza.pptx
@@ -3492,7 +3492,7 @@
                 </a:solidFill>
                 <a:latin typeface="Calibri"/>
               </a:rPr>
-              <a:t>Pista: Pensá en capturar el peón b5 con el peón a4, dejando el caballo c3 a merced de las negras.</a:t>
+              <a:t>Pista: Piensa en capturar el peón b5 con el peón a4, dejando el caballo c3 a merced de las negras.</a:t>
             </a:r>
           </a:p>
         </p:txBody>
@@ -3815,7 +3815,7 @@
                 </a:solidFill>
                 <a:latin typeface="Calibri"/>
               </a:rPr>
-              <a:t>Pista: Pensá en cambiar torres en la columna a, ya que son piezas accesorias frente al verdadero activo blanco.</a:t>
+              <a:t>Pista: Piensa en cambiar torres en la columna a, ya que son piezas accesorias frente al verdadero activo blanco.</a:t>
             </a:r>
           </a:p>
         </p:txBody>
@@ -4138,7 +4138,7 @@
                 </a:solidFill>
                 <a:latin typeface="Calibri"/>
               </a:rPr>
-              <a:t>Pista: Pensá en centralizar el caballo hacia una casilla fuerte, preparando el avance del peón b.</a:t>
+              <a:t>Pista: Piensa en centralizar el caballo hacia una casilla fuerte, preparando el avance del peón b.</a:t>
             </a:r>
           </a:p>
         </p:txBody>
@@ -4461,7 +4461,7 @@
                 </a:solidFill>
                 <a:latin typeface="Calibri"/>
               </a:rPr>
-              <a:t>Pista: Pensá en el peón b avanzando a la octava fila y coronando en dama.</a:t>
+              <a:t>Pista: Piensa en el peón b avanzando a la octava fila y coronando en dama.</a:t>
             </a:r>
           </a:p>
         </p:txBody>
@@ -4714,7 +4714,7 @@
                 </a:solidFill>
                 <a:latin typeface="Calibri"/>
               </a:rPr>
-              <a:t>•  Antes de avanzar los peones pasados decisivos, identificá el plan más corto posible (por ejemplo, Ce5 seguido de b5-b6 y c5-c6) y ejecutalo con calma, sin necesidad de calcular cada variante posible.</a:t>
+              <a:t>•  Antes de avanzar los peones pasados decisivos, identifica el plan más corto posible (por ejemplo, Ce5 seguido de b5-b6 y c5-c6) y ejecútalo con calma, sin necesidad de calcular cada variante posible.</a:t>
             </a:r>
           </a:p>
         </p:txBody>
@@ -4928,7 +4928,7 @@
                 </a:solidFill>
                 <a:latin typeface="Calibri"/>
               </a:rPr>
-              <a:t>•  Cuando tus piezas están mejor coordinadas y el rival carece de columnas abiertas o debilidades para atacar, podés jugar con calma aunque el balance material parezca desfavorable en el papel.</a:t>
+              <a:t>•  Cuando tus piezas están mejor coordinadas y el rival carece de columnas abiertas o debilidades para atacar, puedes jugar con calma aunque el balance material parezca desfavorable en el papel.</a:t>
             </a:r>
           </a:p>
         </p:txBody>
@@ -5316,7 +5316,7 @@
                 </a:solidFill>
                 <a:latin typeface="Calibri"/>
               </a:rPr>
-              <a:t>Pista: Pensá en saltar el caballo hacia el centro, ofreciéndolo a cambio de un peón central.</a:t>
+              <a:t>Pista: Piensa en saltar el caballo hacia el centro, ofreciéndolo a cambio de un peón central.</a:t>
             </a:r>
           </a:p>
         </p:txBody>
@@ -5639,7 +5639,7 @@
                 </a:solidFill>
                 <a:latin typeface="Calibri"/>
               </a:rPr>
-              <a:t>Pista: Pensá en desarrollar el alfil hacia g3, atacando indirectamente al caballo a5 a través de la dama que lo defiende.</a:t>
+              <a:t>Pista: Piensa en desarrollar el alfil hacia g3, atacando indirectamente al caballo a5 a través de la dama que lo defiende.</a:t>
             </a:r>
           </a:p>
         </p:txBody>
@@ -5962,7 +5962,7 @@
                 </a:solidFill>
                 <a:latin typeface="Calibri"/>
               </a:rPr>
-              <a:t>Pista: Pensá en trasladar la torre pasiva hacia la columna b, sumándose a la presión sobre el flanco de dama.</a:t>
+              <a:t>Pista: Piensa en trasladar la torre pasiva hacia la columna b, sumándose a la presión sobre el flanco de dama.</a:t>
             </a:r>
           </a:p>
         </p:txBody>
@@ -6460,7 +6460,7 @@
                 </a:solidFill>
                 <a:latin typeface="Calibri"/>
               </a:rPr>
-              <a:t>Pista: Pensá en avanzar el peón d, activando la poderosa pareja de alfiles y abriendo líneas.</a:t>
+              <a:t>Pista: Piensa en avanzar el peón d, activando la poderosa pareja de alfiles y abriendo líneas.</a:t>
             </a:r>
           </a:p>
         </p:txBody>
@@ -6783,7 +6783,7 @@
                 </a:solidFill>
                 <a:latin typeface="Calibri"/>
               </a:rPr>
-              <a:t>Pista: Pensá en centralizar la dama hacia una casilla desde donde ataque varios puntos débiles a la vez.</a:t>
+              <a:t>Pista: Piensa en centralizar la dama hacia una casilla desde donde ataque varios puntos débiles a la vez.</a:t>
             </a:r>
           </a:p>
         </p:txBody>
@@ -7036,7 +7036,7 @@
                 </a:solidFill>
                 <a:latin typeface="Calibri"/>
               </a:rPr>
-              <a:t>•  Cuando tus piezas están mejor coordinadas y el rival carece de columnas abiertas o debilidades para atacar, podés jugar con calma aunque el balance material parezca desfavorable en el papel.</a:t>
+              <a:t>•  Cuando tus piezas están mejor coordinadas y el rival carece de columnas abiertas o debilidades para atacar, puedes jugar con calma aunque el balance material parezca desfavorable en el papel.</a:t>
             </a:r>
           </a:p>
         </p:txBody>
@@ -7638,7 +7638,7 @@
                 </a:solidFill>
                 <a:latin typeface="Calibri"/>
               </a:rPr>
-              <a:t>Pista: Pensá en capturar el peón d5 con la torre, entregando la torre a cambio de dos peones y una posición abierta para los alfiles.</a:t>
+              <a:t>Pista: Piensa en capturar el peón d5 con la torre, entregando la torre a cambio de dos peones y una posición abierta para los alfiles.</a:t>
             </a:r>
           </a:p>
         </p:txBody>
@@ -7961,7 +7961,7 @@
                 </a:solidFill>
                 <a:latin typeface="Calibri"/>
               </a:rPr>
-              <a:t>Pista: Pensá en avanzar el peón e con jaque, ganando tiempo mientras se acerca a la coronación.</a:t>
+              <a:t>Pista: Piensa en avanzar el peón e con jaque, ganando tiempo mientras se acerca a la coronación.</a:t>
             </a:r>
           </a:p>
         </p:txBody>
@@ -8284,7 +8284,7 @@
                 </a:solidFill>
                 <a:latin typeface="Calibri"/>
               </a:rPr>
-              <a:t>Pista: Pensá en una jugada modesta de peón que proteja al peón f4 sin comprometer nada más.</a:t>
+              <a:t>Pista: Piensa en una jugada modesta de peón que proteja al peón f4 sin comprometer nada más.</a:t>
             </a:r>
           </a:p>
         </p:txBody>
@@ -8607,7 +8607,7 @@
                 </a:solidFill>
                 <a:latin typeface="Calibri"/>
               </a:rPr>
-              <a:t>Pista: Pensá en avanzar el peón b, atacando directamente a la pieza negra que sostiene la posición.</a:t>
+              <a:t>Pista: Piensa en avanzar el peón b, atacando directamente a la pieza negra que sostiene la posición.</a:t>
             </a:r>
           </a:p>
         </p:txBody>
@@ -8930,7 +8930,7 @@
                 </a:solidFill>
                 <a:latin typeface="Calibri"/>
               </a:rPr>
-              <a:t>Pista: Pensá en avanzar el peón e a la séptima fila.</a:t>
+              <a:t>Pista: Piensa en avanzar el peón e a la séptima fila.</a:t>
             </a:r>
           </a:p>
         </p:txBody>
@@ -9556,7 +9556,7 @@
                 </a:solidFill>
                 <a:latin typeface="Calibri"/>
               </a:rPr>
-              <a:t>•  Cuando tenés ventaja de material efectiva (una pieza contra pocos peones dispersos), buscá simplificar hacia un final de piezas menores donde tu rey y tus piezas puedan fijar y atacar las debilidades una por una.</a:t>
+              <a:t>•  Cuando tienes ventaja de material efectiva (una pieza contra pocos peones dispersos), busca simplificar hacia un final de piezas menores donde tu rey y tus piezas puedan fijar y atacar las debilidades una por una.</a:t>
             </a:r>
           </a:p>
         </p:txBody>
@@ -9944,7 +9944,7 @@
                 </a:solidFill>
                 <a:latin typeface="Calibri"/>
               </a:rPr>
-              <a:t>Pista: Pensá en un avance de peón modesto en el flanco de dama que ocupe una casilla oscura.</a:t>
+              <a:t>Pista: Piensa en un avance de peón modesto en el flanco de dama que ocupe una casilla oscura.</a:t>
             </a:r>
           </a:p>
         </p:txBody>
@@ -10267,7 +10267,7 @@
                 </a:solidFill>
                 <a:latin typeface="Calibri"/>
               </a:rPr>
-              <a:t>Pista: Pensá en ofrecer el cambio de torres en la columna d, iniciando una cadena de intercambios.</a:t>
+              <a:t>Pista: Piensa en ofrecer el cambio de torres en la columna d, iniciando una cadena de intercambios.</a:t>
             </a:r>
           </a:p>
         </p:txBody>
@@ -10590,7 +10590,7 @@
                 </a:solidFill>
                 <a:latin typeface="Calibri"/>
               </a:rPr>
-              <a:t>Pista: Pensá en colocar el alfil en una casilla donde ataque directamente al peón a2.</a:t>
+              <a:t>Pista: Piensa en colocar el alfil en una casilla donde ataque directamente al peón a2.</a:t>
             </a:r>
           </a:p>
         </p:txBody>
@@ -10913,7 +10913,7 @@
                 </a:solidFill>
                 <a:latin typeface="Calibri"/>
               </a:rPr>
-              <a:t>Pista: Pensá en una jugada de alfil que ataque el peón g4, forzando su avance.</a:t>
+              <a:t>Pista: Piensa en una jugada de alfil que ataque el peón g4, forzando su avance.</a:t>
             </a:r>
           </a:p>
         </p:txBody>
@@ -11236,7 +11236,7 @@
                 </a:solidFill>
                 <a:latin typeface="Calibri"/>
               </a:rPr>
-              <a:t>Pista: Pensá en atacar al alfil defensor desde la segunda fila, obligándolo a moverse.</a:t>
+              <a:t>Pista: Piensa en atacar al alfil defensor desde la segunda fila, obligándolo a moverse.</a:t>
             </a:r>
           </a:p>
         </p:txBody>
@@ -11489,7 +11489,7 @@
                 </a:solidFill>
                 <a:latin typeface="Calibri"/>
               </a:rPr>
-              <a:t>•  Cuando tenés ventaja de material efectiva (una pieza contra pocos peones dispersos), buscá simplificar hacia un final de piezas menores donde tu rey y tus piezas puedan fijar y atacar las debilidades una por una.</a:t>
+              <a:t>•  Cuando tienes ventaja de material efectiva (una pieza contra pocos peones dispersos), busca simplificar hacia un final de piezas menores donde tu rey y tus piezas puedan fijar y atacar las debilidades una por una.</a:t>
             </a:r>
           </a:p>
         </p:txBody>
@@ -11632,7 +11632,7 @@
                 </a:solidFill>
                 <a:latin typeface="Calibri"/>
               </a:rPr>
-              <a:t>Jugá contra el motor la posición de Anand–Wang Hao con las blancas, practicando cómo mantener en movimiento la masa de peones centrales sin dejar que se estabilicen. Después estudiá Vocaturo–Vallejo Pons como caso de advertencia y anotá en qué jugada quedó claro que los tres peones blancos ya no iban a poder avanzar.</a:t>
+              <a:t>Juega contra el motor la posición de Anand–Wang Hao con las blancas, practicando cómo mantener en movimiento la masa de peones centrales sin dejar que se estabilicen. Después estudia Vocaturo–Vallejo Pons como caso de advertencia y anota en qué jugada quedó claro que los tres peones blancos ya no iban a poder avanzar.</a:t>
             </a:r>
           </a:p>
           <a:p>
@@ -11664,7 +11664,7 @@
                 </a:solidFill>
                 <a:latin typeface="Calibri"/>
               </a:rPr>
-              <a:t>En la página del curso podés recorrer cada partida con los comentarios, adivinar las jugadas clave en el tablero y continuar cualquier posición contra el motor (Stockfish). La hoja de ejercicios en PDF reúne los momentos clave de esta lección para resolver sin tablero.</a:t>
+              <a:t>En la página del curso puedes recorrer cada partida con los comentarios, adivinar las jugadas clave en el tablero y continuar cualquier posición contra el motor (Stockfish). La hoja de ejercicios en PDF reúne los momentos clave de esta lección para resolver sin tablero.</a:t>
             </a:r>
           </a:p>
         </p:txBody>
@@ -11703,7 +11703,7 @@
                 </a:solidFill>
                 <a:latin typeface="Calibri"/>
               </a:rPr>
-              <a:t>•  Primero recorré la partida completa leyendo los comentarios.</a:t>
+              <a:t>•  Primero recorre la partida completa leyendo los comentarios.</a:t>
             </a:r>
           </a:p>
           <a:p>
@@ -11719,7 +11719,7 @@
                 </a:solidFill>
                 <a:latin typeface="Calibri"/>
               </a:rPr>
-              <a:t>•  Después hacé el modo "adivinar las jugadas clave" hasta acertar todas.</a:t>
+              <a:t>•  Después haz el modo "adivinar las jugadas clave" hasta acertar todas.</a:t>
             </a:r>
           </a:p>
           <a:p>
@@ -11735,7 +11735,7 @@
                 </a:solidFill>
                 <a:latin typeface="Calibri"/>
               </a:rPr>
-              <a:t>•  Por último respondé el cuestionario y anotá con tus palabras las reglas de la lección.</a:t>
+              <a:t>•  Por último responde el cuestionario y anota con tus palabras las reglas de la lección.</a:t>
             </a:r>
           </a:p>
         </p:txBody>
@@ -12180,7 +12180,7 @@
                 </a:solidFill>
                 <a:latin typeface="Calibri"/>
               </a:rPr>
-              <a:t>•  Antes de entregar una pieza por peones, comprobá que esos peones sean móviles y estén apoyados entre sí.</a:t>
+              <a:t>•  Antes de entregar una pieza por peones, comprueba que esos peones sean móviles y estén apoyados entre sí.</a:t>
             </a:r>
           </a:p>
           <a:p>
@@ -12196,7 +12196,7 @@
                 </a:solidFill>
                 <a:latin typeface="Calibri"/>
               </a:rPr>
-              <a:t>•  Priorizá peones que puedan conectarse como pasados: dos conectados valen tanto como la pieza entregada.</a:t>
+              <a:t>•  Prioriza peones que puedan conectarse como pasados: dos conectados valen tanto como la pieza entregada.</a:t>
             </a:r>
           </a:p>
           <a:p>
@@ -12228,7 +12228,7 @@
                 </a:solidFill>
                 <a:latin typeface="Calibri"/>
               </a:rPr>
-              <a:t>•  Si recibís la pieza, bloqueá cuanto antes: peones estáticos casi nunca justifican el sacrificio.</a:t>
+              <a:t>•  Si recibes la pieza, bloquea cuanto antes: peones estáticos casi nunca justifican el sacrificio.</a:t>
             </a:r>
           </a:p>
           <a:p>
@@ -12458,7 +12458,7 @@
                 </a:solidFill>
                 <a:latin typeface="Calibri"/>
               </a:rPr>
-              <a:t>•  Antes de avanzar los peones pasados decisivos, identificá el plan más corto posible (por ejemplo, Ce5 seguido de b5-b6 y c5-c6) y ejecutalo con calma, sin necesidad de calcular cada variante posible.</a:t>
+              <a:t>•  Antes de avanzar los peones pasados decisivos, identifica el plan más corto posible (por ejemplo, Ce5 seguido de b5-b6 y c5-c6) y ejecútalo con calma, sin necesidad de calcular cada variante posible.</a:t>
             </a:r>
           </a:p>
         </p:txBody>
@@ -12846,7 +12846,7 @@
                 </a:solidFill>
                 <a:latin typeface="Calibri"/>
               </a:rPr>
-              <a:t>Pista: Pensá en avanzar el peón a hasta la cuarta fila, preparando el sacrificio decisivo.</a:t>
+              <a:t>Pista: Piensa en avanzar el peón a hasta la cuarta fila, preparando el sacrificio decisivo.</a:t>
             </a:r>
           </a:p>
         </p:txBody>
